--- a/ゲーム科3年/00_前期/ゲームエンジンⅤ/11_マテリアルの基礎.pptx
+++ b/ゲーム科3年/00_前期/ゲームエンジンⅤ/11_マテリアルの基礎.pptx
@@ -270,7 +270,7 @@
           <a:p>
             <a:fld id="{E9CC885B-4903-4D54-9A93-00025F12DED9}" type="datetimeFigureOut">
               <a:rPr kumimoji="1" lang="ja-JP" altLang="en-US" smtClean="0"/>
-              <a:t>2025/2/13</a:t>
+              <a:t>2026/3/26</a:t>
             </a:fld>
             <a:endParaRPr kumimoji="1" lang="ja-JP" altLang="en-US"/>
           </a:p>
@@ -500,7 +500,7 @@
           <a:p>
             <a:fld id="{E9CC885B-4903-4D54-9A93-00025F12DED9}" type="datetimeFigureOut">
               <a:rPr kumimoji="1" lang="ja-JP" altLang="en-US" smtClean="0"/>
-              <a:t>2025/2/13</a:t>
+              <a:t>2026/3/26</a:t>
             </a:fld>
             <a:endParaRPr kumimoji="1" lang="ja-JP" altLang="en-US"/>
           </a:p>
@@ -740,7 +740,7 @@
           <a:p>
             <a:fld id="{E9CC885B-4903-4D54-9A93-00025F12DED9}" type="datetimeFigureOut">
               <a:rPr kumimoji="1" lang="ja-JP" altLang="en-US" smtClean="0"/>
-              <a:t>2025/2/13</a:t>
+              <a:t>2026/3/26</a:t>
             </a:fld>
             <a:endParaRPr kumimoji="1" lang="ja-JP" altLang="en-US"/>
           </a:p>
@@ -970,7 +970,7 @@
           <a:p>
             <a:fld id="{E9CC885B-4903-4D54-9A93-00025F12DED9}" type="datetimeFigureOut">
               <a:rPr kumimoji="1" lang="ja-JP" altLang="en-US" smtClean="0"/>
-              <a:t>2025/2/13</a:t>
+              <a:t>2026/3/26</a:t>
             </a:fld>
             <a:endParaRPr kumimoji="1" lang="ja-JP" altLang="en-US"/>
           </a:p>
@@ -1245,7 +1245,7 @@
           <a:p>
             <a:fld id="{E9CC885B-4903-4D54-9A93-00025F12DED9}" type="datetimeFigureOut">
               <a:rPr kumimoji="1" lang="ja-JP" altLang="en-US" smtClean="0"/>
-              <a:t>2025/2/13</a:t>
+              <a:t>2026/3/26</a:t>
             </a:fld>
             <a:endParaRPr kumimoji="1" lang="ja-JP" altLang="en-US"/>
           </a:p>
@@ -1574,7 +1574,7 @@
           <a:p>
             <a:fld id="{E9CC885B-4903-4D54-9A93-00025F12DED9}" type="datetimeFigureOut">
               <a:rPr kumimoji="1" lang="ja-JP" altLang="en-US" smtClean="0"/>
-              <a:t>2025/2/13</a:t>
+              <a:t>2026/3/26</a:t>
             </a:fld>
             <a:endParaRPr kumimoji="1" lang="ja-JP" altLang="en-US"/>
           </a:p>
@@ -2050,7 +2050,7 @@
           <a:p>
             <a:fld id="{E9CC885B-4903-4D54-9A93-00025F12DED9}" type="datetimeFigureOut">
               <a:rPr kumimoji="1" lang="ja-JP" altLang="en-US" smtClean="0"/>
-              <a:t>2025/2/13</a:t>
+              <a:t>2026/3/26</a:t>
             </a:fld>
             <a:endParaRPr kumimoji="1" lang="ja-JP" altLang="en-US"/>
           </a:p>
@@ -2191,7 +2191,7 @@
           <a:p>
             <a:fld id="{E9CC885B-4903-4D54-9A93-00025F12DED9}" type="datetimeFigureOut">
               <a:rPr kumimoji="1" lang="ja-JP" altLang="en-US" smtClean="0"/>
-              <a:t>2025/2/13</a:t>
+              <a:t>2026/3/26</a:t>
             </a:fld>
             <a:endParaRPr kumimoji="1" lang="ja-JP" altLang="en-US"/>
           </a:p>
@@ -2304,7 +2304,7 @@
           <a:p>
             <a:fld id="{E9CC885B-4903-4D54-9A93-00025F12DED9}" type="datetimeFigureOut">
               <a:rPr kumimoji="1" lang="ja-JP" altLang="en-US" smtClean="0"/>
-              <a:t>2025/2/13</a:t>
+              <a:t>2026/3/26</a:t>
             </a:fld>
             <a:endParaRPr kumimoji="1" lang="ja-JP" altLang="en-US"/>
           </a:p>
@@ -2647,7 +2647,7 @@
           <a:p>
             <a:fld id="{E9CC885B-4903-4D54-9A93-00025F12DED9}" type="datetimeFigureOut">
               <a:rPr kumimoji="1" lang="ja-JP" altLang="en-US" smtClean="0"/>
-              <a:t>2025/2/13</a:t>
+              <a:t>2026/3/26</a:t>
             </a:fld>
             <a:endParaRPr kumimoji="1" lang="ja-JP" altLang="en-US"/>
           </a:p>
@@ -2935,7 +2935,7 @@
           <a:p>
             <a:fld id="{E9CC885B-4903-4D54-9A93-00025F12DED9}" type="datetimeFigureOut">
               <a:rPr kumimoji="1" lang="ja-JP" altLang="en-US" smtClean="0"/>
-              <a:t>2025/2/13</a:t>
+              <a:t>2026/3/26</a:t>
             </a:fld>
             <a:endParaRPr kumimoji="1" lang="ja-JP" altLang="en-US"/>
           </a:p>
@@ -3208,7 +3208,7 @@
           <a:p>
             <a:fld id="{E9CC885B-4903-4D54-9A93-00025F12DED9}" type="datetimeFigureOut">
               <a:rPr kumimoji="1" lang="ja-JP" altLang="en-US" smtClean="0"/>
-              <a:t>2025/2/13</a:t>
+              <a:t>2026/3/26</a:t>
             </a:fld>
             <a:endParaRPr kumimoji="1" lang="ja-JP" altLang="en-US"/>
           </a:p>
@@ -3941,7 +3941,7 @@
         <p:spPr>
           <a:xfrm>
             <a:off x="567542" y="1216429"/>
-            <a:ext cx="7879080" cy="830997"/>
+            <a:ext cx="9725739" cy="830997"/>
           </a:xfrm>
           <a:prstGeom prst="rect">
             <a:avLst/>
@@ -3967,7 +3967,7 @@
                   <a:srgbClr val="FF0000"/>
                 </a:solidFill>
               </a:rPr>
-              <a:t>保存したタイミングでオブジェクトにも反映</a:t>
+              <a:t>コンパイル＆保存したタイミングでオブジェクトにも反映</a:t>
             </a:r>
             <a:r>
               <a:rPr lang="ja-JP" altLang="en-US" sz="2400" dirty="0"/>
@@ -4349,7 +4349,7 @@
         <p:spPr>
           <a:xfrm>
             <a:off x="567542" y="1216429"/>
-            <a:ext cx="7443063" cy="830997"/>
+            <a:ext cx="8981946" cy="830997"/>
           </a:xfrm>
           <a:prstGeom prst="rect">
             <a:avLst/>
@@ -4380,7 +4380,7 @@
             </a:r>
             <a:r>
               <a:rPr kumimoji="1" lang="ja-JP" altLang="en-US" sz="2400" dirty="0"/>
-              <a:t>を作成して、中で右クリックし、</a:t>
+              <a:t>を作成して、フォルダ内で右クリックし、</a:t>
             </a:r>
             <a:endParaRPr kumimoji="1" lang="en-US" altLang="ja-JP" sz="2400" dirty="0"/>
           </a:p>
@@ -4664,7 +4664,7 @@
         <p:spPr>
           <a:xfrm>
             <a:off x="567542" y="1216429"/>
-            <a:ext cx="8186857" cy="830997"/>
+            <a:ext cx="9417963" cy="461665"/>
           </a:xfrm>
           <a:prstGeom prst="rect">
             <a:avLst/>
@@ -4691,14 +4691,7 @@
             </a:r>
             <a:r>
               <a:rPr kumimoji="1" lang="ja-JP" altLang="en-US" sz="2400" dirty="0"/>
-              <a:t>のようなことが、</a:t>
-            </a:r>
-            <a:endParaRPr kumimoji="1" lang="en-US" altLang="ja-JP" sz="2400" dirty="0"/>
-          </a:p>
-          <a:p>
-            <a:r>
-              <a:rPr lang="ja-JP" altLang="en-US" sz="2400" dirty="0"/>
-              <a:t>ノードで組むことができます。</a:t>
+              <a:t>を組むことができます。</a:t>
             </a:r>
             <a:endParaRPr kumimoji="1" lang="en-US" altLang="ja-JP" sz="2400" dirty="0"/>
           </a:p>
